--- a/FASE 2/Evidencias Proyecto/Presentación Proyecto APT FASE 2.pptx
+++ b/FASE 2/Evidencias Proyecto/Presentación Proyecto APT FASE 2.pptx
@@ -123,12 +123,12 @@
   <pc:docChgLst>
     <pc:chgData name="Vicente Vargas" userId="c61a9f73193c7e5d" providerId="LiveId" clId="{DEC01DA5-8198-47DF-AE35-8D6A85D15581}"/>
     <pc:docChg chg="custSel modSld">
-      <pc:chgData name="Vicente Vargas" userId="c61a9f73193c7e5d" providerId="LiveId" clId="{DEC01DA5-8198-47DF-AE35-8D6A85D15581}" dt="2026-06-08T01:39:42.138" v="2" actId="313"/>
+      <pc:chgData name="Vicente Vargas" userId="c61a9f73193c7e5d" providerId="LiveId" clId="{DEC01DA5-8198-47DF-AE35-8D6A85D15581}" dt="2026-06-08T07:00:57.592" v="20" actId="20577"/>
       <pc:docMkLst>
         <pc:docMk/>
       </pc:docMkLst>
       <pc:sldChg chg="modSp mod">
-        <pc:chgData name="Vicente Vargas" userId="c61a9f73193c7e5d" providerId="LiveId" clId="{DEC01DA5-8198-47DF-AE35-8D6A85D15581}" dt="2026-06-08T01:32:28.573" v="1" actId="27636"/>
+        <pc:chgData name="Vicente Vargas" userId="c61a9f73193c7e5d" providerId="LiveId" clId="{DEC01DA5-8198-47DF-AE35-8D6A85D15581}" dt="2026-06-08T07:00:57.592" v="20" actId="20577"/>
         <pc:sldMkLst>
           <pc:docMk/>
           <pc:sldMk cId="4195868176" sldId="256"/>
@@ -139,6 +139,14 @@
             <pc:docMk/>
             <pc:sldMk cId="4195868176" sldId="256"/>
             <ac:spMk id="3" creationId="{B33F04C4-9AD4-511D-1BB1-9FBDE2633733}"/>
+          </ac:spMkLst>
+        </pc:spChg>
+        <pc:spChg chg="mod">
+          <ac:chgData name="Vicente Vargas" userId="c61a9f73193c7e5d" providerId="LiveId" clId="{DEC01DA5-8198-47DF-AE35-8D6A85D15581}" dt="2026-06-08T07:00:57.592" v="20" actId="20577"/>
+          <ac:spMkLst>
+            <pc:docMk/>
+            <pc:sldMk cId="4195868176" sldId="256"/>
+            <ac:spMk id="4" creationId="{ECCEA75E-6559-9779-5541-44021F4DF219}"/>
           </ac:spMkLst>
         </pc:spChg>
       </pc:sldChg>
@@ -295,7 +303,7 @@
           <a:p>
             <a:fld id="{65C263AB-B9F4-4D24-A8FB-B975F901C5DE}" type="datetimeFigureOut">
               <a:rPr lang="es-CL" smtClean="0"/>
-              <a:t>07-06-2026</a:t>
+              <a:t>08-06-2026</a:t>
             </a:fld>
             <a:endParaRPr lang="es-CL"/>
           </a:p>
@@ -582,7 +590,7 @@
           <a:p>
             <a:fld id="{65C263AB-B9F4-4D24-A8FB-B975F901C5DE}" type="datetimeFigureOut">
               <a:rPr lang="es-CL" smtClean="0"/>
-              <a:t>07-06-2026</a:t>
+              <a:t>08-06-2026</a:t>
             </a:fld>
             <a:endParaRPr lang="es-CL"/>
           </a:p>
@@ -774,7 +782,7 @@
           <a:p>
             <a:fld id="{65C263AB-B9F4-4D24-A8FB-B975F901C5DE}" type="datetimeFigureOut">
               <a:rPr lang="es-CL" smtClean="0"/>
-              <a:t>07-06-2026</a:t>
+              <a:t>08-06-2026</a:t>
             </a:fld>
             <a:endParaRPr lang="es-CL"/>
           </a:p>
@@ -1035,7 +1043,7 @@
           <a:p>
             <a:fld id="{65C263AB-B9F4-4D24-A8FB-B975F901C5DE}" type="datetimeFigureOut">
               <a:rPr lang="es-CL" smtClean="0"/>
-              <a:t>07-06-2026</a:t>
+              <a:t>08-06-2026</a:t>
             </a:fld>
             <a:endParaRPr lang="es-CL"/>
           </a:p>
@@ -1459,7 +1467,7 @@
           <a:p>
             <a:fld id="{65C263AB-B9F4-4D24-A8FB-B975F901C5DE}" type="datetimeFigureOut">
               <a:rPr lang="es-CL" smtClean="0"/>
-              <a:t>07-06-2026</a:t>
+              <a:t>08-06-2026</a:t>
             </a:fld>
             <a:endParaRPr lang="es-CL"/>
           </a:p>
@@ -2005,7 +2013,7 @@
           <a:p>
             <a:fld id="{65C263AB-B9F4-4D24-A8FB-B975F901C5DE}" type="datetimeFigureOut">
               <a:rPr lang="es-CL" smtClean="0"/>
-              <a:t>07-06-2026</a:t>
+              <a:t>08-06-2026</a:t>
             </a:fld>
             <a:endParaRPr lang="es-CL"/>
           </a:p>
@@ -2845,7 +2853,7 @@
           <a:p>
             <a:fld id="{65C263AB-B9F4-4D24-A8FB-B975F901C5DE}" type="datetimeFigureOut">
               <a:rPr lang="es-CL" smtClean="0"/>
-              <a:t>07-06-2026</a:t>
+              <a:t>08-06-2026</a:t>
             </a:fld>
             <a:endParaRPr lang="es-CL"/>
           </a:p>
@@ -3015,7 +3023,7 @@
           <a:p>
             <a:fld id="{65C263AB-B9F4-4D24-A8FB-B975F901C5DE}" type="datetimeFigureOut">
               <a:rPr lang="es-CL" smtClean="0"/>
-              <a:t>07-06-2026</a:t>
+              <a:t>08-06-2026</a:t>
             </a:fld>
             <a:endParaRPr lang="es-CL"/>
           </a:p>
@@ -3199,7 +3207,7 @@
           <a:p>
             <a:fld id="{65C263AB-B9F4-4D24-A8FB-B975F901C5DE}" type="datetimeFigureOut">
               <a:rPr lang="es-CL" smtClean="0"/>
-              <a:t>07-06-2026</a:t>
+              <a:t>08-06-2026</a:t>
             </a:fld>
             <a:endParaRPr lang="es-CL"/>
           </a:p>
@@ -3369,7 +3377,7 @@
           <a:p>
             <a:fld id="{65C263AB-B9F4-4D24-A8FB-B975F901C5DE}" type="datetimeFigureOut">
               <a:rPr lang="es-CL" smtClean="0"/>
-              <a:t>07-06-2026</a:t>
+              <a:t>08-06-2026</a:t>
             </a:fld>
             <a:endParaRPr lang="es-CL"/>
           </a:p>
@@ -3617,7 +3625,7 @@
           <a:p>
             <a:fld id="{65C263AB-B9F4-4D24-A8FB-B975F901C5DE}" type="datetimeFigureOut">
               <a:rPr lang="es-CL" smtClean="0"/>
-              <a:t>07-06-2026</a:t>
+              <a:t>08-06-2026</a:t>
             </a:fld>
             <a:endParaRPr lang="es-CL"/>
           </a:p>
@@ -3854,7 +3862,7 @@
           <a:p>
             <a:fld id="{65C263AB-B9F4-4D24-A8FB-B975F901C5DE}" type="datetimeFigureOut">
               <a:rPr lang="es-CL" smtClean="0"/>
-              <a:t>07-06-2026</a:t>
+              <a:t>08-06-2026</a:t>
             </a:fld>
             <a:endParaRPr lang="es-CL"/>
           </a:p>
@@ -4227,7 +4235,7 @@
           <a:p>
             <a:fld id="{65C263AB-B9F4-4D24-A8FB-B975F901C5DE}" type="datetimeFigureOut">
               <a:rPr lang="es-CL" smtClean="0"/>
-              <a:t>07-06-2026</a:t>
+              <a:t>08-06-2026</a:t>
             </a:fld>
             <a:endParaRPr lang="es-CL"/>
           </a:p>
@@ -4345,7 +4353,7 @@
           <a:p>
             <a:fld id="{65C263AB-B9F4-4D24-A8FB-B975F901C5DE}" type="datetimeFigureOut">
               <a:rPr lang="es-CL" smtClean="0"/>
-              <a:t>07-06-2026</a:t>
+              <a:t>08-06-2026</a:t>
             </a:fld>
             <a:endParaRPr lang="es-CL"/>
           </a:p>
@@ -4440,7 +4448,7 @@
           <a:p>
             <a:fld id="{65C263AB-B9F4-4D24-A8FB-B975F901C5DE}" type="datetimeFigureOut">
               <a:rPr lang="es-CL" smtClean="0"/>
-              <a:t>07-06-2026</a:t>
+              <a:t>08-06-2026</a:t>
             </a:fld>
             <a:endParaRPr lang="es-CL"/>
           </a:p>
@@ -4691,7 +4699,7 @@
           <a:p>
             <a:fld id="{65C263AB-B9F4-4D24-A8FB-B975F901C5DE}" type="datetimeFigureOut">
               <a:rPr lang="es-CL" smtClean="0"/>
-              <a:t>07-06-2026</a:t>
+              <a:t>08-06-2026</a:t>
             </a:fld>
             <a:endParaRPr lang="es-CL"/>
           </a:p>
@@ -4978,7 +4986,7 @@
           <a:p>
             <a:fld id="{65C263AB-B9F4-4D24-A8FB-B975F901C5DE}" type="datetimeFigureOut">
               <a:rPr lang="es-CL" smtClean="0"/>
-              <a:t>07-06-2026</a:t>
+              <a:t>08-06-2026</a:t>
             </a:fld>
             <a:endParaRPr lang="es-CL"/>
           </a:p>
@@ -5191,7 +5199,7 @@
           <a:p>
             <a:fld id="{65C263AB-B9F4-4D24-A8FB-B975F901C5DE}" type="datetimeFigureOut">
               <a:rPr lang="es-CL" smtClean="0"/>
-              <a:t>07-06-2026</a:t>
+              <a:t>08-06-2026</a:t>
             </a:fld>
             <a:endParaRPr lang="es-CL"/>
           </a:p>
@@ -6064,16 +6072,16 @@
           </a:p>
           <a:p>
             <a:r>
-              <a:rPr lang="es-CL" sz="3600" b="1" dirty="0">
+              <a:rPr lang="es-CL" sz="3600" b="1">
                 <a:effectLst/>
               </a:rPr>
               <a:t>Docente</a:t>
             </a:r>
             <a:r>
-              <a:rPr lang="es-CL" sz="3600" dirty="0">
+              <a:rPr lang="es-CL" sz="3600">
                 <a:effectLst/>
               </a:rPr>
-              <a:t>:</a:t>
+              <a:t>: Karla Marilyn</a:t>
             </a:r>
             <a:br>
               <a:rPr lang="es-CL" dirty="0"/>
